--- a/Introduction to AI Assisted Programming Slides.pptx
+++ b/Introduction to AI Assisted Programming Slides.pptx
@@ -137,7 +137,7 @@
 <file path=ppt/revisionInfo.xml><?xml version="1.0" encoding="utf-8"?>
 <p1510:revInfo xmlns:a="http://schemas.openxmlformats.org/drawingml/2006/main" xmlns:r="http://schemas.openxmlformats.org/officeDocument/2006/relationships" xmlns:p1510="http://schemas.microsoft.com/office/powerpoint/2015/10/main">
   <p1510:revLst>
-    <p1510:client id="{4A035382-9336-4654-9ECC-B7F3E1F3B18A}" v="3" dt="2025-10-24T08:50:54.675"/>
+    <p1510:client id="{E567966D-95E8-40DE-974D-9B611914B7DB}" v="2" dt="2026-10-09T09:18:01.521"/>
   </p1510:revLst>
 </p1510:revInfo>
 </file>
@@ -145,20 +145,20 @@
 <file path=ppt/changesInfos/changesInfo1.xml><?xml version="1.0" encoding="utf-8"?>
 <pc:chgInfo xmlns:a="http://schemas.openxmlformats.org/drawingml/2006/main" xmlns:r="http://schemas.openxmlformats.org/officeDocument/2006/relationships" xmlns:ac="http://schemas.microsoft.com/office/drawing/2013/main/command" xmlns:pc="http://schemas.microsoft.com/office/powerpoint/2013/main/command">
   <pc:docChgLst>
-    <pc:chgData name="Cooling, Chris" userId="6dcf99c9-2ba5-410a-8445-0893a3d1421f" providerId="ADAL" clId="{4A035382-9336-4654-9ECC-B7F3E1F3B18A}"/>
-    <pc:docChg chg="custSel delSld modSld">
-      <pc:chgData name="Cooling, Chris" userId="6dcf99c9-2ba5-410a-8445-0893a3d1421f" providerId="ADAL" clId="{4A035382-9336-4654-9ECC-B7F3E1F3B18A}" dt="2025-10-24T10:06:20.424" v="8" actId="47"/>
+    <pc:chgData name="Cooling, Chris" userId="6dcf99c9-2ba5-410a-8445-0893a3d1421f" providerId="ADAL" clId="{0564427D-CD1D-4B33-9C97-2A8069F97102}"/>
+    <pc:docChg chg="custSel modSld">
+      <pc:chgData name="Cooling, Chris" userId="6dcf99c9-2ba5-410a-8445-0893a3d1421f" providerId="ADAL" clId="{0564427D-CD1D-4B33-9C97-2A8069F97102}" dt="2026-10-09T09:18:26.150" v="13" actId="255"/>
       <pc:docMkLst>
         <pc:docMk/>
       </pc:docMkLst>
       <pc:sldChg chg="addSp delSp modSp mod">
-        <pc:chgData name="Cooling, Chris" userId="6dcf99c9-2ba5-410a-8445-0893a3d1421f" providerId="ADAL" clId="{4A035382-9336-4654-9ECC-B7F3E1F3B18A}" dt="2025-10-24T08:50:54.670" v="7" actId="20577"/>
+        <pc:chgData name="Cooling, Chris" userId="6dcf99c9-2ba5-410a-8445-0893a3d1421f" providerId="ADAL" clId="{0564427D-CD1D-4B33-9C97-2A8069F97102}" dt="2026-10-09T09:18:26.150" v="13" actId="255"/>
         <pc:sldMkLst>
           <pc:docMk/>
           <pc:sldMk cId="1507190070" sldId="359"/>
         </pc:sldMkLst>
         <pc:spChg chg="mod">
-          <ac:chgData name="Cooling, Chris" userId="6dcf99c9-2ba5-410a-8445-0893a3d1421f" providerId="ADAL" clId="{4A035382-9336-4654-9ECC-B7F3E1F3B18A}" dt="2025-10-24T08:50:54.670" v="7" actId="20577"/>
+          <ac:chgData name="Cooling, Chris" userId="6dcf99c9-2ba5-410a-8445-0893a3d1421f" providerId="ADAL" clId="{0564427D-CD1D-4B33-9C97-2A8069F97102}" dt="2026-10-09T09:18:26.150" v="13" actId="255"/>
           <ac:spMkLst>
             <pc:docMk/>
             <pc:sldMk cId="1507190070" sldId="359"/>
@@ -166,64 +166,21 @@
           </ac:spMkLst>
         </pc:spChg>
         <pc:picChg chg="add mod">
-          <ac:chgData name="Cooling, Chris" userId="6dcf99c9-2ba5-410a-8445-0893a3d1421f" providerId="ADAL" clId="{4A035382-9336-4654-9ECC-B7F3E1F3B18A}" dt="2025-10-16T13:14:28.339" v="5" actId="1076"/>
+          <ac:chgData name="Cooling, Chris" userId="6dcf99c9-2ba5-410a-8445-0893a3d1421f" providerId="ADAL" clId="{0564427D-CD1D-4B33-9C97-2A8069F97102}" dt="2026-10-09T09:17:25.724" v="4" actId="14100"/>
+          <ac:picMkLst>
+            <pc:docMk/>
+            <pc:sldMk cId="1507190070" sldId="359"/>
+            <ac:picMk id="5" creationId="{C3C0A4C1-C115-8DDD-D437-EEE734C506C7}"/>
+          </ac:picMkLst>
+        </pc:picChg>
+        <pc:picChg chg="del">
+          <ac:chgData name="Cooling, Chris" userId="6dcf99c9-2ba5-410a-8445-0893a3d1421f" providerId="ADAL" clId="{0564427D-CD1D-4B33-9C97-2A8069F97102}" dt="2026-10-09T09:17:17.492" v="0" actId="478"/>
           <ac:picMkLst>
             <pc:docMk/>
             <pc:sldMk cId="1507190070" sldId="359"/>
             <ac:picMk id="10" creationId="{E59F772E-8D41-7413-21DF-82FA14373829}"/>
           </ac:picMkLst>
         </pc:picChg>
-      </pc:sldChg>
-      <pc:sldChg chg="del">
-        <pc:chgData name="Cooling, Chris" userId="6dcf99c9-2ba5-410a-8445-0893a3d1421f" providerId="ADAL" clId="{4A035382-9336-4654-9ECC-B7F3E1F3B18A}" dt="2025-10-24T10:06:20.424" v="8" actId="47"/>
-        <pc:sldMkLst>
-          <pc:docMk/>
-          <pc:sldMk cId="3543295302" sldId="406"/>
-        </pc:sldMkLst>
-      </pc:sldChg>
-    </pc:docChg>
-  </pc:docChgLst>
-  <pc:docChgLst>
-    <pc:chgData name="Cooling, Chris" userId="6dcf99c9-2ba5-410a-8445-0893a3d1421f" providerId="ADAL" clId="{233900DF-C175-416B-811C-16116199DB54}"/>
-    <pc:docChg chg="undo custSel addSld delSld modSld">
-      <pc:chgData name="Cooling, Chris" userId="6dcf99c9-2ba5-410a-8445-0893a3d1421f" providerId="ADAL" clId="{233900DF-C175-416B-811C-16116199DB54}" dt="2024-10-29T15:14:45.314" v="134" actId="47"/>
-      <pc:docMkLst>
-        <pc:docMk/>
-      </pc:docMkLst>
-      <pc:sldChg chg="modSp del mod">
-        <pc:chgData name="Cooling, Chris" userId="6dcf99c9-2ba5-410a-8445-0893a3d1421f" providerId="ADAL" clId="{233900DF-C175-416B-811C-16116199DB54}" dt="2024-10-29T15:14:45.314" v="134" actId="47"/>
-        <pc:sldMkLst>
-          <pc:docMk/>
-          <pc:sldMk cId="3212729572" sldId="323"/>
-        </pc:sldMkLst>
-      </pc:sldChg>
-      <pc:sldChg chg="modSp add mod">
-        <pc:chgData name="Cooling, Chris" userId="6dcf99c9-2ba5-410a-8445-0893a3d1421f" providerId="ADAL" clId="{233900DF-C175-416B-811C-16116199DB54}" dt="2024-10-29T15:14:39.498" v="133"/>
-        <pc:sldMkLst>
-          <pc:docMk/>
-          <pc:sldMk cId="380350440" sldId="326"/>
-        </pc:sldMkLst>
-      </pc:sldChg>
-      <pc:sldChg chg="modSp mod">
-        <pc:chgData name="Cooling, Chris" userId="6dcf99c9-2ba5-410a-8445-0893a3d1421f" providerId="ADAL" clId="{233900DF-C175-416B-811C-16116199DB54}" dt="2024-10-29T15:11:33.709" v="48" actId="113"/>
-        <pc:sldMkLst>
-          <pc:docMk/>
-          <pc:sldMk cId="16407505" sldId="361"/>
-        </pc:sldMkLst>
-      </pc:sldChg>
-      <pc:sldChg chg="del">
-        <pc:chgData name="Cooling, Chris" userId="6dcf99c9-2ba5-410a-8445-0893a3d1421f" providerId="ADAL" clId="{233900DF-C175-416B-811C-16116199DB54}" dt="2024-10-29T15:10:13.817" v="39" actId="2696"/>
-        <pc:sldMkLst>
-          <pc:docMk/>
-          <pc:sldMk cId="4288594215" sldId="407"/>
-        </pc:sldMkLst>
-      </pc:sldChg>
-      <pc:sldChg chg="modSp mod">
-        <pc:chgData name="Cooling, Chris" userId="6dcf99c9-2ba5-410a-8445-0893a3d1421f" providerId="ADAL" clId="{233900DF-C175-416B-811C-16116199DB54}" dt="2024-10-29T15:13:38.661" v="130" actId="20577"/>
-        <pc:sldMkLst>
-          <pc:docMk/>
-          <pc:sldMk cId="3343614994" sldId="408"/>
-        </pc:sldMkLst>
       </pc:sldChg>
     </pc:docChg>
   </pc:docChgLst>
@@ -312,7 +269,7 @@
           <a:p>
             <a:fld id="{D2E0D2A8-8F95-47C2-ABE1-A779F5A43C98}" type="datetimeFigureOut">
               <a:rPr lang="en-US" smtClean="0"/>
-              <a:t>10/24/2025</a:t>
+              <a:t>10/9/2026</a:t>
             </a:fld>
             <a:endParaRPr lang="en-US"/>
           </a:p>
@@ -1123,7 +1080,7 @@
           <a:p>
             <a:fld id="{8B657A42-A972-40C4-B9DD-D0914FC74315}" type="datetime1">
               <a:rPr lang="en-GB" smtClean="0"/>
-              <a:t>24/10/2025</a:t>
+              <a:t>09/10/2026</a:t>
             </a:fld>
             <a:endParaRPr lang="en-GB"/>
           </a:p>
@@ -1449,7 +1406,7 @@
           <a:p>
             <a:fld id="{AB06FF05-DC6B-4898-9B89-E18A52AA7DC1}" type="datetime1">
               <a:rPr lang="en-GB" smtClean="0"/>
-              <a:t>24/10/2025</a:t>
+              <a:t>09/10/2026</a:t>
             </a:fld>
             <a:endParaRPr lang="en-GB"/>
           </a:p>
@@ -1777,7 +1734,7 @@
           <a:p>
             <a:fld id="{135754F1-9A72-4E8C-A00B-56CCA23D2334}" type="datetime1">
               <a:rPr lang="en-GB" smtClean="0"/>
-              <a:t>24/10/2025</a:t>
+              <a:t>09/10/2026</a:t>
             </a:fld>
             <a:endParaRPr lang="en-GB"/>
           </a:p>
@@ -2153,7 +2110,7 @@
           <a:p>
             <a:fld id="{59EFCA73-57DA-427B-8AAF-6BA0261BCAB8}" type="datetime1">
               <a:rPr lang="en-GB" smtClean="0"/>
-              <a:t>24/10/2025</a:t>
+              <a:t>09/10/2026</a:t>
             </a:fld>
             <a:endParaRPr lang="en-GB"/>
           </a:p>
@@ -2536,7 +2493,7 @@
           <a:p>
             <a:fld id="{F2378310-F801-4DC0-8E48-82422E8BD799}" type="datetime1">
               <a:rPr lang="en-GB" smtClean="0"/>
-              <a:t>24/10/2025</a:t>
+              <a:t>09/10/2026</a:t>
             </a:fld>
             <a:endParaRPr lang="en-GB"/>
           </a:p>
@@ -2921,7 +2878,7 @@
           <a:p>
             <a:fld id="{2EB4BB13-7895-49E9-AB8C-8E0E8025356B}" type="datetime1">
               <a:rPr lang="en-GB" smtClean="0"/>
-              <a:t>24/10/2025</a:t>
+              <a:t>09/10/2026</a:t>
             </a:fld>
             <a:endParaRPr lang="en-GB"/>
           </a:p>
@@ -3148,7 +3105,7 @@
           <a:p>
             <a:fld id="{A29BD8B8-F461-4EFE-963B-9E961A18021F}" type="datetime1">
               <a:rPr lang="en-GB" smtClean="0"/>
-              <a:t>24/10/2025</a:t>
+              <a:t>09/10/2026</a:t>
             </a:fld>
             <a:endParaRPr lang="en-GB"/>
           </a:p>
@@ -3646,7 +3603,7 @@
           <a:p>
             <a:fld id="{4C8E4D3C-C67B-4EB7-BFE5-ECD2A74A8E1B}" type="datetime1">
               <a:rPr lang="en-GB" smtClean="0"/>
-              <a:t>24/10/2025</a:t>
+              <a:t>09/10/2026</a:t>
             </a:fld>
             <a:endParaRPr lang="en-GB"/>
           </a:p>
@@ -4146,7 +4103,7 @@
           <a:p>
             <a:fld id="{41CF59D5-5A0A-4ED0-B804-DA666F03CA1F}" type="datetime1">
               <a:rPr lang="en-GB" smtClean="0"/>
-              <a:t>24/10/2025</a:t>
+              <a:t>09/10/2026</a:t>
             </a:fld>
             <a:endParaRPr lang="en-GB"/>
           </a:p>
@@ -4636,7 +4593,7 @@
           <a:p>
             <a:fld id="{16E05F7D-6D26-44F8-841F-052726E23689}" type="datetime1">
               <a:rPr lang="en-GB" smtClean="0"/>
-              <a:t>24/10/2025</a:t>
+              <a:t>09/10/2026</a:t>
             </a:fld>
             <a:endParaRPr lang="en-GB"/>
           </a:p>
@@ -5447,7 +5404,7 @@
           <a:p>
             <a:fld id="{DF1FC705-8F10-4987-94C2-45EF64447951}" type="datetime1">
               <a:rPr lang="en-GB" smtClean="0"/>
-              <a:t>24/10/2025</a:t>
+              <a:t>09/10/2026</a:t>
             </a:fld>
             <a:endParaRPr lang="en-GB"/>
           </a:p>
@@ -6064,7 +6021,7 @@
           <a:p>
             <a:fld id="{81AB0282-ADA5-4279-8AF5-FD2602BD02E1}" type="datetime1">
               <a:rPr lang="en-GB" smtClean="0"/>
-              <a:t>24/10/2025</a:t>
+              <a:t>09/10/2026</a:t>
             </a:fld>
             <a:endParaRPr lang="en-GB"/>
           </a:p>
@@ -6684,7 +6641,7 @@
           <a:p>
             <a:fld id="{CF6B8527-9C5B-4EC2-9C8A-73DBC22D3285}" type="datetime1">
               <a:rPr lang="en-GB" smtClean="0"/>
-              <a:t>24/10/2025</a:t>
+              <a:t>09/10/2026</a:t>
             </a:fld>
             <a:endParaRPr lang="en-GB"/>
           </a:p>
@@ -6855,7 +6812,7 @@
           <a:p>
             <a:fld id="{5877177E-8AF1-4C22-B3A9-CFC88EC5B560}" type="datetime1">
               <a:rPr lang="en-GB" smtClean="0"/>
-              <a:t>24/10/2025</a:t>
+              <a:t>09/10/2026</a:t>
             </a:fld>
             <a:endParaRPr lang="en-GB"/>
           </a:p>
@@ -7028,7 +6985,7 @@
           <a:p>
             <a:fld id="{C74B48B1-0E30-4098-8D38-42BE4C9AF21E}" type="datetime1">
               <a:rPr lang="en-GB" smtClean="0"/>
-              <a:t>24/10/2025</a:t>
+              <a:t>09/10/2026</a:t>
             </a:fld>
             <a:endParaRPr lang="en-GB"/>
           </a:p>
@@ -7207,7 +7164,7 @@
           <a:p>
             <a:fld id="{519D6801-89D7-417F-85DF-C16A2E39C294}" type="datetime1">
               <a:rPr lang="en-GB" smtClean="0"/>
-              <a:t>24/10/2025</a:t>
+              <a:t>09/10/2026</a:t>
             </a:fld>
             <a:endParaRPr lang="en-GB" dirty="0"/>
           </a:p>
@@ -7401,7 +7358,7 @@
           <a:p>
             <a:fld id="{0469A95D-CA21-4505-B563-C017F16DC961}" type="datetime1">
               <a:rPr lang="en-GB" smtClean="0"/>
-              <a:t>24/10/2025</a:t>
+              <a:t>09/10/2026</a:t>
             </a:fld>
             <a:endParaRPr lang="en-GB" dirty="0"/>
           </a:p>
@@ -7681,7 +7638,7 @@
           <a:p>
             <a:fld id="{CA35F6A9-2C8D-4FB9-B924-FE658DB02DD5}" type="datetime1">
               <a:rPr lang="en-GB" smtClean="0"/>
-              <a:t>24/10/2025</a:t>
+              <a:t>09/10/2026</a:t>
             </a:fld>
             <a:endParaRPr lang="en-GB" dirty="0"/>
           </a:p>
@@ -7962,7 +7919,7 @@
           <a:p>
             <a:fld id="{4B0A7020-E4C6-40DD-9E69-0DC13C82416A}" type="datetime1">
               <a:rPr lang="en-GB" smtClean="0"/>
-              <a:t>24/10/2025</a:t>
+              <a:t>09/10/2026</a:t>
             </a:fld>
             <a:endParaRPr lang="en-GB" dirty="0"/>
           </a:p>
@@ -8242,7 +8199,7 @@
           <a:p>
             <a:fld id="{8E202B61-819F-4215-B495-E3A0EFD6EC07}" type="datetime1">
               <a:rPr lang="en-GB" smtClean="0"/>
-              <a:t>24/10/2025</a:t>
+              <a:t>09/10/2026</a:t>
             </a:fld>
             <a:endParaRPr lang="en-GB" dirty="0"/>
           </a:p>
@@ -8718,7 +8675,7 @@
           <a:p>
             <a:fld id="{86B9E15F-062C-43EE-BC48-353830617963}" type="datetime1">
               <a:rPr lang="en-GB" smtClean="0"/>
-              <a:t>24/10/2025</a:t>
+              <a:t>09/10/2026</a:t>
             </a:fld>
             <a:endParaRPr lang="en-GB" dirty="0"/>
           </a:p>
@@ -8998,7 +8955,7 @@
           <a:p>
             <a:fld id="{DAA18657-9DEE-4C6F-B402-5FA5E455182F}" type="datetime1">
               <a:rPr lang="en-GB" smtClean="0"/>
-              <a:t>24/10/2025</a:t>
+              <a:t>09/10/2026</a:t>
             </a:fld>
             <a:endParaRPr lang="en-GB" dirty="0"/>
           </a:p>
@@ -9278,7 +9235,7 @@
           <a:p>
             <a:fld id="{254704C0-6751-42CD-9A31-40B3572790F8}" type="datetime1">
               <a:rPr lang="en-GB" smtClean="0"/>
-              <a:t>24/10/2025</a:t>
+              <a:t>09/10/2026</a:t>
             </a:fld>
             <a:endParaRPr lang="en-GB" dirty="0"/>
           </a:p>
@@ -9542,7 +9499,7 @@
           <a:p>
             <a:fld id="{53A11063-EA65-485C-8301-8FA43B13787D}" type="datetime1">
               <a:rPr lang="en-GB" smtClean="0"/>
-              <a:t>24/10/2025</a:t>
+              <a:t>09/10/2026</a:t>
             </a:fld>
             <a:endParaRPr lang="en-GB"/>
           </a:p>
@@ -9930,7 +9887,7 @@
           <a:p>
             <a:fld id="{891233F8-046B-4A5C-9007-1F1AD2775381}" type="datetime1">
               <a:rPr lang="en-GB" smtClean="0"/>
-              <a:t>24/10/2025</a:t>
+              <a:t>09/10/2026</a:t>
             </a:fld>
             <a:endParaRPr lang="en-GB"/>
           </a:p>
@@ -10312,7 +10269,7 @@
           <a:p>
             <a:fld id="{509D0F34-3D43-4B8D-ADA4-14CCBB8EDF22}" type="datetime1">
               <a:rPr lang="en-GB" smtClean="0"/>
-              <a:t>24/10/2025</a:t>
+              <a:t>09/10/2026</a:t>
             </a:fld>
             <a:endParaRPr lang="en-GB"/>
           </a:p>
@@ -10684,7 +10641,7 @@
           <a:p>
             <a:fld id="{CC0B6343-0655-4443-A8B8-A4BAB6D8C07F}" type="datetime1">
               <a:rPr lang="en-GB" smtClean="0"/>
-              <a:t>24/10/2025</a:t>
+              <a:t>09/10/2026</a:t>
             </a:fld>
             <a:endParaRPr lang="en-GB"/>
           </a:p>
@@ -11091,7 +11048,7 @@
           <a:p>
             <a:fld id="{31F8F412-10EA-4CFB-B14E-09F2321FCDAD}" type="datetime1">
               <a:rPr lang="en-GB" smtClean="0"/>
-              <a:t>24/10/2025</a:t>
+              <a:t>09/10/2026</a:t>
             </a:fld>
             <a:endParaRPr lang="en-GB"/>
           </a:p>
@@ -11500,7 +11457,7 @@
           <a:p>
             <a:fld id="{4C573020-A5A2-4737-BF13-CE65F5A16124}" type="datetime1">
               <a:rPr lang="en-GB" smtClean="0"/>
-              <a:t>24/10/2025</a:t>
+              <a:t>09/10/2026</a:t>
             </a:fld>
             <a:endParaRPr lang="en-GB"/>
           </a:p>
@@ -11899,7 +11856,7 @@
           <a:p>
             <a:fld id="{7BCCFEAB-E41D-496F-89F1-067636B26939}" type="datetime1">
               <a:rPr lang="en-GB" smtClean="0"/>
-              <a:t>24/10/2025</a:t>
+              <a:t>09/10/2026</a:t>
             </a:fld>
             <a:endParaRPr lang="en-GB"/>
           </a:p>
@@ -12697,7 +12654,7 @@
           <a:p>
             <a:fld id="{235429AD-E80D-43F0-B8C4-A0437D212C50}" type="datetime1">
               <a:rPr lang="en-GB" smtClean="0"/>
-              <a:t>24/10/2025</a:t>
+              <a:t>09/10/2026</a:t>
             </a:fld>
             <a:endParaRPr lang="en-GB"/>
           </a:p>
@@ -13301,7 +13258,7 @@
           <a:p>
             <a:fld id="{5F4367D8-780F-4511-BB7C-6B1768D5D31D}" type="datetime1">
               <a:rPr lang="en-GB" smtClean="0"/>
-              <a:t>24/10/2025</a:t>
+              <a:t>09/10/2026</a:t>
             </a:fld>
             <a:endParaRPr lang="en-GB"/>
           </a:p>
@@ -13895,7 +13852,7 @@
           <a:p>
             <a:fld id="{8C8846E4-2B70-40A4-9433-835E504C5B78}" type="datetime1">
               <a:rPr lang="en-GB" smtClean="0"/>
-              <a:t>24/10/2025</a:t>
+              <a:t>09/10/2026</a:t>
             </a:fld>
             <a:endParaRPr lang="en-GB"/>
           </a:p>
@@ -14232,7 +14189,7 @@
           <a:p>
             <a:fld id="{493A7CCF-39F1-49A0-AEF4-5081CE998F77}" type="datetime1">
               <a:rPr lang="en-GB" smtClean="0"/>
-              <a:t>24/10/2025</a:t>
+              <a:t>09/10/2026</a:t>
             </a:fld>
             <a:endParaRPr lang="en-GB"/>
           </a:p>
@@ -14571,7 +14528,7 @@
           <a:p>
             <a:fld id="{3B57BA70-6322-43C1-94DC-D039B39CB1E5}" type="datetime1">
               <a:rPr lang="en-GB" smtClean="0"/>
-              <a:t>24/10/2025</a:t>
+              <a:t>09/10/2026</a:t>
             </a:fld>
             <a:endParaRPr lang="en-GB"/>
           </a:p>
@@ -14900,7 +14857,7 @@
           <a:p>
             <a:fld id="{6947DAFE-DBA1-4A09-A49F-E636C08D284D}" type="datetime1">
               <a:rPr lang="en-GB" smtClean="0"/>
-              <a:t>24/10/2025</a:t>
+              <a:t>09/10/2026</a:t>
             </a:fld>
             <a:endParaRPr lang="en-GB"/>
           </a:p>
@@ -15237,7 +15194,7 @@
           <a:p>
             <a:fld id="{8D0F3E9D-2DE3-4D5A-B05F-D877DED77C25}" type="datetime1">
               <a:rPr lang="en-GB" smtClean="0"/>
-              <a:t>24/10/2025</a:t>
+              <a:t>09/10/2026</a:t>
             </a:fld>
             <a:endParaRPr lang="en-GB"/>
           </a:p>
@@ -15576,7 +15533,7 @@
           <a:p>
             <a:fld id="{AD2A17EE-44C4-4272-8C98-5EA8DB2CCCF7}" type="datetime1">
               <a:rPr lang="en-GB" smtClean="0"/>
-              <a:t>24/10/2025</a:t>
+              <a:t>09/10/2026</a:t>
             </a:fld>
             <a:endParaRPr lang="en-GB"/>
           </a:p>
@@ -15905,7 +15862,7 @@
           <a:p>
             <a:fld id="{E6057D5B-8344-4F1A-A53D-3F06760A22EE}" type="datetime1">
               <a:rPr lang="en-GB" smtClean="0"/>
-              <a:t>24/10/2025</a:t>
+              <a:t>09/10/2026</a:t>
             </a:fld>
             <a:endParaRPr lang="en-GB"/>
           </a:p>
@@ -16143,7 +16100,7 @@
           <a:p>
             <a:fld id="{C79F500A-5FD8-4195-B64D-0864905B7984}" type="datetime1">
               <a:rPr lang="en-GB" smtClean="0"/>
-              <a:t>24/10/2025</a:t>
+              <a:t>09/10/2026</a:t>
             </a:fld>
             <a:endParaRPr lang="en-GB"/>
           </a:p>
@@ -16579,7 +16536,7 @@
           <a:p>
             <a:fld id="{FC423EE5-1C17-4720-B7BE-8168A6010685}" type="datetime1">
               <a:rPr lang="en-GB" smtClean="0"/>
-              <a:t>24/10/2025</a:t>
+              <a:t>09/10/2026</a:t>
             </a:fld>
             <a:endParaRPr lang="en-GB"/>
           </a:p>
@@ -17117,7 +17074,7 @@
           <a:p>
             <a:fld id="{3A4CB9A5-C3AC-4504-8448-61A4C8BF47B3}" type="datetime1">
               <a:rPr lang="en-GB" smtClean="0"/>
-              <a:t>24/10/2025</a:t>
+              <a:t>09/10/2026</a:t>
             </a:fld>
             <a:endParaRPr lang="en-GB"/>
           </a:p>
@@ -17396,7 +17353,7 @@
           <a:p>
             <a:fld id="{947FB866-F309-4A67-BBFB-24B323CE3DCA}" type="datetime1">
               <a:rPr lang="en-GB" smtClean="0"/>
-              <a:t>24/10/2025</a:t>
+              <a:t>09/10/2026</a:t>
             </a:fld>
             <a:endParaRPr lang="en-GB"/>
           </a:p>
@@ -17681,7 +17638,7 @@
           <a:p>
             <a:fld id="{BF7F0BEB-5319-417C-B3A4-624E5500047F}" type="datetime1">
               <a:rPr lang="en-GB" smtClean="0"/>
-              <a:t>24/10/2025</a:t>
+              <a:t>09/10/2026</a:t>
             </a:fld>
             <a:endParaRPr lang="en-GB"/>
           </a:p>
@@ -17974,7 +17931,7 @@
           <a:p>
             <a:fld id="{AD1C1943-ED58-4788-AEE8-DFB94F3B02E6}" type="datetime1">
               <a:rPr lang="en-GB" smtClean="0"/>
-              <a:t>24/10/2025</a:t>
+              <a:t>09/10/2026</a:t>
             </a:fld>
             <a:endParaRPr lang="en-GB"/>
           </a:p>
@@ -18391,7 +18348,7 @@
           <a:p>
             <a:fld id="{DBBF74BF-A73C-47DF-B6E5-A9970CAB19EA}" type="datetime1">
               <a:rPr lang="en-GB" smtClean="0"/>
-              <a:t>24/10/2025</a:t>
+              <a:t>09/10/2026</a:t>
             </a:fld>
             <a:endParaRPr lang="en-GB" dirty="0"/>
           </a:p>
@@ -19179,7 +19136,7 @@
           <a:p>
             <a:fld id="{C718BC38-C27E-42ED-B708-4E08619BA91D}" type="datetime1">
               <a:rPr lang="en-GB" smtClean="0"/>
-              <a:t>24/10/2025</a:t>
+              <a:t>09/10/2026</a:t>
             </a:fld>
             <a:endParaRPr lang="en-GB"/>
           </a:p>
@@ -19514,7 +19471,7 @@
           <a:p>
             <a:fld id="{D61E177E-917F-4329-8599-0FCAC72F92F2}" type="datetime1">
               <a:rPr lang="en-GB" smtClean="0"/>
-              <a:t>24/10/2025</a:t>
+              <a:t>09/10/2026</a:t>
             </a:fld>
             <a:endParaRPr lang="en-GB"/>
           </a:p>
@@ -19837,7 +19794,7 @@
           <a:p>
             <a:fld id="{80893C79-CCCD-4BDD-989B-0A3D05D1E3C5}" type="datetime1">
               <a:rPr lang="en-GB" smtClean="0"/>
-              <a:t>24/10/2025</a:t>
+              <a:t>09/10/2026</a:t>
             </a:fld>
             <a:endParaRPr lang="en-GB"/>
           </a:p>
@@ -20003,7 +19960,7 @@
           <a:p>
             <a:fld id="{BBEFB9E1-F59E-4B1E-AB8B-98B6DECF71D9}" type="datetime1">
               <a:rPr lang="en-GB" smtClean="0"/>
-              <a:t>24/10/2025</a:t>
+              <a:t>09/10/2026</a:t>
             </a:fld>
             <a:endParaRPr lang="en-GB"/>
           </a:p>
@@ -20160,7 +20117,7 @@
               <a:buChar char="•"/>
             </a:pPr>
             <a:r>
-              <a:rPr lang="en-GB" sz="3000" dirty="0"/>
+              <a:rPr lang="en-GB" sz="2800" dirty="0"/>
               <a:t>Once you’ve completed this course, please provide feedback</a:t>
             </a:r>
           </a:p>
@@ -20170,27 +20127,16 @@
               <a:buChar char="•"/>
             </a:pPr>
             <a:r>
-              <a:rPr lang="en-GB" sz="2600" dirty="0"/>
-              <a:t>The link </a:t>
-            </a:r>
-            <a:r>
-              <a:rPr lang="en-GB" sz="2600"/>
-              <a:t>is </a:t>
-            </a:r>
-            <a:r>
-              <a:rPr lang="en-GB" sz="2600" u="sng">
-                <a:solidFill>
-                  <a:srgbClr val="0563C1"/>
-                </a:solidFill>
+              <a:rPr lang="en-GB" sz="2800" dirty="0"/>
+              <a:t>The link is </a:t>
+            </a:r>
+            <a:r>
+              <a:rPr lang="en-GB" sz="2800" dirty="0">
                 <a:hlinkClick r:id="rId3"/>
               </a:rPr>
-              <a:t>https://ecri.short.gy/feedback-rcds</a:t>
-            </a:r>
-            <a:endParaRPr lang="en-GB" sz="2600" u="sng">
-              <a:solidFill>
-                <a:srgbClr val="0563C1"/>
-              </a:solidFill>
-            </a:endParaRPr>
+              <a:t>https://ecri.short.gy/feedback-ai-prog-intro</a:t>
+            </a:r>
+            <a:endParaRPr lang="en-GB" sz="2800" dirty="0"/>
           </a:p>
           <a:p>
             <a:pPr marL="457200" lvl="1" indent="-457200">
@@ -20198,12 +20144,8 @@
               <a:buChar char="•"/>
             </a:pPr>
             <a:r>
-              <a:rPr lang="en-GB" sz="2600"/>
-              <a:t>You </a:t>
-            </a:r>
-            <a:r>
-              <a:rPr lang="en-GB" sz="2600" dirty="0"/>
-              <a:t>should also have received an email with this link</a:t>
+              <a:rPr lang="en-GB" sz="2800" dirty="0"/>
+              <a:t>You should also have received an email with this link</a:t>
             </a:r>
           </a:p>
           <a:p>
@@ -20212,7 +20154,7 @@
               <a:buChar char="•"/>
             </a:pPr>
             <a:r>
-              <a:rPr lang="en-GB" sz="2600" dirty="0"/>
+              <a:rPr lang="en-GB" sz="2800" dirty="0"/>
               <a:t>This helps us improve the class for future students</a:t>
             </a:r>
           </a:p>
@@ -20223,10 +20165,10 @@
       </p:sp>
       <p:pic>
         <p:nvPicPr>
-          <p:cNvPr id="10" name="Picture 9" descr="A qr code on a white background&#10;&#10;AI-generated content may be incorrect.">
-            <a:extLst>
-              <a:ext uri="{FF2B5EF4-FFF2-40B4-BE49-F238E27FC236}">
-                <a16:creationId xmlns:a16="http://schemas.microsoft.com/office/drawing/2014/main" id="{E59F772E-8D41-7413-21DF-82FA14373829}"/>
+          <p:cNvPr id="5" name="Picture 4">
+            <a:extLst>
+              <a:ext uri="{FF2B5EF4-FFF2-40B4-BE49-F238E27FC236}">
+                <a16:creationId xmlns:a16="http://schemas.microsoft.com/office/drawing/2014/main" id="{C3C0A4C1-C115-8DDD-D437-EEE734C506C7}"/>
               </a:ext>
             </a:extLst>
           </p:cNvPr>
@@ -20249,8 +20191,8 @@
         </p:blipFill>
         <p:spPr>
           <a:xfrm>
-            <a:off x="220968" y="996285"/>
-            <a:ext cx="5167745" cy="5167745"/>
+            <a:off x="325800" y="912395"/>
+            <a:ext cx="5067300" cy="5067300"/>
           </a:xfrm>
           <a:prstGeom prst="rect">
             <a:avLst/>
